--- a/template.pptx
+++ b/template.pptx
@@ -118,7 +118,7 @@
 <file path=ppt/revisionInfo.xml><?xml version="1.0" encoding="utf-8"?>
 <p1510:revInfo xmlns:a="http://schemas.openxmlformats.org/drawingml/2006/main" xmlns:r="http://schemas.openxmlformats.org/officeDocument/2006/relationships" xmlns:p1510="http://schemas.microsoft.com/office/powerpoint/2015/10/main">
   <p1510:revLst>
-    <p1510:client id="{2AA6B5CB-5FCA-4505-9C30-BB64B3BC592E}" v="9" dt="2026-03-15T00:53:09.503"/>
+    <p1510:client id="{2AA6B5CB-5FCA-4505-9C30-BB64B3BC592E}" v="14" dt="2026-03-16T04:04:24.560"/>
   </p1510:revLst>
 </p1510:revInfo>
 </file>
@@ -128,7 +128,7 @@
   <pc:docChgLst>
     <pc:chgData name="Stefannia Tasayco" userId="072a22e4-2104-4c8c-b416-a8e6a0e1c0b9" providerId="ADAL" clId="{4D11E0C6-27F8-4F56-86FF-F439AAE3AE4B}"/>
     <pc:docChg chg="undo custSel addSld delSld modSld addMainMaster delMainMaster modMainMaster">
-      <pc:chgData name="Stefannia Tasayco" userId="072a22e4-2104-4c8c-b416-a8e6a0e1c0b9" providerId="ADAL" clId="{4D11E0C6-27F8-4F56-86FF-F439AAE3AE4B}" dt="2026-03-15T01:16:05.338" v="331" actId="1036"/>
+      <pc:chgData name="Stefannia Tasayco" userId="072a22e4-2104-4c8c-b416-a8e6a0e1c0b9" providerId="ADAL" clId="{4D11E0C6-27F8-4F56-86FF-F439AAE3AE4B}" dt="2026-03-16T04:11:06.027" v="528" actId="1035"/>
       <pc:docMkLst>
         <pc:docMk/>
       </pc:docMkLst>
@@ -226,7 +226,7 @@
         </pc:sldMkLst>
       </pc:sldChg>
       <pc:sldMasterChg chg="addSp mod modSldLayout">
-        <pc:chgData name="Stefannia Tasayco" userId="072a22e4-2104-4c8c-b416-a8e6a0e1c0b9" providerId="ADAL" clId="{4D11E0C6-27F8-4F56-86FF-F439AAE3AE4B}" dt="2026-03-15T01:16:05.338" v="331" actId="1036"/>
+        <pc:chgData name="Stefannia Tasayco" userId="072a22e4-2104-4c8c-b416-a8e6a0e1c0b9" providerId="ADAL" clId="{4D11E0C6-27F8-4F56-86FF-F439AAE3AE4B}" dt="2026-03-16T04:11:06.027" v="528" actId="1035"/>
         <pc:sldMasterMkLst>
           <pc:docMk/>
           <pc:sldMasterMk cId="4082366308" sldId="2147483648"/>
@@ -371,13 +371,40 @@
             </ac:spMkLst>
           </pc:spChg>
         </pc:sldLayoutChg>
-        <pc:sldLayoutChg chg="modSp">
-          <pc:chgData name="Stefannia Tasayco" userId="072a22e4-2104-4c8c-b416-a8e6a0e1c0b9" providerId="ADAL" clId="{4D11E0C6-27F8-4F56-86FF-F439AAE3AE4B}" dt="2026-03-15T00:52:28.182" v="66"/>
+        <pc:sldLayoutChg chg="modSp mod">
+          <pc:chgData name="Stefannia Tasayco" userId="072a22e4-2104-4c8c-b416-a8e6a0e1c0b9" providerId="ADAL" clId="{4D11E0C6-27F8-4F56-86FF-F439AAE3AE4B}" dt="2026-03-15T06:18:26.288" v="411" actId="14100"/>
           <pc:sldLayoutMkLst>
             <pc:docMk/>
             <pc:sldMasterMk cId="4082366308" sldId="2147483648"/>
             <pc:sldLayoutMk cId="3966436003" sldId="2147483652"/>
           </pc:sldLayoutMkLst>
+          <pc:spChg chg="mod">
+            <ac:chgData name="Stefannia Tasayco" userId="072a22e4-2104-4c8c-b416-a8e6a0e1c0b9" providerId="ADAL" clId="{4D11E0C6-27F8-4F56-86FF-F439AAE3AE4B}" dt="2026-03-15T06:17:45.929" v="406" actId="1035"/>
+            <ac:spMkLst>
+              <pc:docMk/>
+              <pc:sldMasterMk cId="4082366308" sldId="2147483648"/>
+              <pc:sldLayoutMk cId="3966436003" sldId="2147483652"/>
+              <ac:spMk id="2" creationId="{A428DFBD-F5ED-455C-8AD0-97476A55E3D5}"/>
+            </ac:spMkLst>
+          </pc:spChg>
+          <pc:spChg chg="mod">
+            <ac:chgData name="Stefannia Tasayco" userId="072a22e4-2104-4c8c-b416-a8e6a0e1c0b9" providerId="ADAL" clId="{4D11E0C6-27F8-4F56-86FF-F439AAE3AE4B}" dt="2026-03-15T06:18:15.531" v="410" actId="14100"/>
+            <ac:spMkLst>
+              <pc:docMk/>
+              <pc:sldMasterMk cId="4082366308" sldId="2147483648"/>
+              <pc:sldLayoutMk cId="3966436003" sldId="2147483652"/>
+              <ac:spMk id="3" creationId="{8C30E58C-F463-4D52-9225-9410133113A4}"/>
+            </ac:spMkLst>
+          </pc:spChg>
+          <pc:spChg chg="mod">
+            <ac:chgData name="Stefannia Tasayco" userId="072a22e4-2104-4c8c-b416-a8e6a0e1c0b9" providerId="ADAL" clId="{4D11E0C6-27F8-4F56-86FF-F439AAE3AE4B}" dt="2026-03-15T06:18:26.288" v="411" actId="14100"/>
+            <ac:spMkLst>
+              <pc:docMk/>
+              <pc:sldMasterMk cId="4082366308" sldId="2147483648"/>
+              <pc:sldLayoutMk cId="3966436003" sldId="2147483652"/>
+              <ac:spMk id="4" creationId="{6AF7BDB4-97FA-485D-A557-6F96692BAC9E}"/>
+            </ac:spMkLst>
+          </pc:spChg>
           <pc:spChg chg="mod">
             <ac:chgData name="Stefannia Tasayco" userId="072a22e4-2104-4c8c-b416-a8e6a0e1c0b9" providerId="ADAL" clId="{4D11E0C6-27F8-4F56-86FF-F439AAE3AE4B}" dt="2026-03-15T00:52:28.182" v="66"/>
             <ac:spMkLst>
@@ -388,13 +415,58 @@
             </ac:spMkLst>
           </pc:spChg>
         </pc:sldLayoutChg>
-        <pc:sldLayoutChg chg="modSp">
-          <pc:chgData name="Stefannia Tasayco" userId="072a22e4-2104-4c8c-b416-a8e6a0e1c0b9" providerId="ADAL" clId="{4D11E0C6-27F8-4F56-86FF-F439AAE3AE4B}" dt="2026-03-15T00:52:28.182" v="66"/>
+        <pc:sldLayoutChg chg="addSp delSp modSp mod">
+          <pc:chgData name="Stefannia Tasayco" userId="072a22e4-2104-4c8c-b416-a8e6a0e1c0b9" providerId="ADAL" clId="{4D11E0C6-27F8-4F56-86FF-F439AAE3AE4B}" dt="2026-03-16T04:11:06.027" v="528" actId="1035"/>
           <pc:sldLayoutMkLst>
             <pc:docMk/>
             <pc:sldMasterMk cId="4082366308" sldId="2147483648"/>
             <pc:sldLayoutMk cId="444478242" sldId="2147483653"/>
           </pc:sldLayoutMkLst>
+          <pc:spChg chg="add del">
+            <ac:chgData name="Stefannia Tasayco" userId="072a22e4-2104-4c8c-b416-a8e6a0e1c0b9" providerId="ADAL" clId="{4D11E0C6-27F8-4F56-86FF-F439AAE3AE4B}" dt="2026-03-16T04:04:01.043" v="416" actId="11529"/>
+            <ac:spMkLst>
+              <pc:docMk/>
+              <pc:sldMasterMk cId="4082366308" sldId="2147483648"/>
+              <pc:sldLayoutMk cId="444478242" sldId="2147483653"/>
+              <ac:spMk id="2" creationId="{CD8459E1-0745-2567-7D39-31AAD02FEDE4}"/>
+            </ac:spMkLst>
+          </pc:spChg>
+          <pc:spChg chg="del">
+            <ac:chgData name="Stefannia Tasayco" userId="072a22e4-2104-4c8c-b416-a8e6a0e1c0b9" providerId="ADAL" clId="{4D11E0C6-27F8-4F56-86FF-F439AAE3AE4B}" dt="2026-03-16T04:04:23.682" v="419" actId="478"/>
+            <ac:spMkLst>
+              <pc:docMk/>
+              <pc:sldMasterMk cId="4082366308" sldId="2147483648"/>
+              <pc:sldLayoutMk cId="444478242" sldId="2147483653"/>
+              <ac:spMk id="3" creationId="{82036E0D-26A5-455A-A8BD-70DA8BC03EB2}"/>
+            </ac:spMkLst>
+          </pc:spChg>
+          <pc:spChg chg="mod">
+            <ac:chgData name="Stefannia Tasayco" userId="072a22e4-2104-4c8c-b416-a8e6a0e1c0b9" providerId="ADAL" clId="{4D11E0C6-27F8-4F56-86FF-F439AAE3AE4B}" dt="2026-03-16T04:09:37.204" v="514" actId="1076"/>
+            <ac:spMkLst>
+              <pc:docMk/>
+              <pc:sldMasterMk cId="4082366308" sldId="2147483648"/>
+              <pc:sldLayoutMk cId="444478242" sldId="2147483653"/>
+              <ac:spMk id="4" creationId="{E7FD4EA0-094D-4056-9032-BFB44B40896B}"/>
+            </ac:spMkLst>
+          </pc:spChg>
+          <pc:spChg chg="del">
+            <ac:chgData name="Stefannia Tasayco" userId="072a22e4-2104-4c8c-b416-a8e6a0e1c0b9" providerId="ADAL" clId="{4D11E0C6-27F8-4F56-86FF-F439AAE3AE4B}" dt="2026-03-16T04:03:50.011" v="415" actId="478"/>
+            <ac:spMkLst>
+              <pc:docMk/>
+              <pc:sldMasterMk cId="4082366308" sldId="2147483648"/>
+              <pc:sldLayoutMk cId="444478242" sldId="2147483653"/>
+              <ac:spMk id="5" creationId="{5FC0CCE8-718F-4620-8B4A-C60EEA7B884D}"/>
+            </ac:spMkLst>
+          </pc:spChg>
+          <pc:spChg chg="mod">
+            <ac:chgData name="Stefannia Tasayco" userId="072a22e4-2104-4c8c-b416-a8e6a0e1c0b9" providerId="ADAL" clId="{4D11E0C6-27F8-4F56-86FF-F439AAE3AE4B}" dt="2026-03-16T04:09:47.447" v="515" actId="1076"/>
+            <ac:spMkLst>
+              <pc:docMk/>
+              <pc:sldMasterMk cId="4082366308" sldId="2147483648"/>
+              <pc:sldLayoutMk cId="444478242" sldId="2147483653"/>
+              <ac:spMk id="6" creationId="{56CE86DF-0069-4D31-BDD3-A9A2F9B7B468}"/>
+            </ac:spMkLst>
+          </pc:spChg>
           <pc:spChg chg="mod">
             <ac:chgData name="Stefannia Tasayco" userId="072a22e4-2104-4c8c-b416-a8e6a0e1c0b9" providerId="ADAL" clId="{4D11E0C6-27F8-4F56-86FF-F439AAE3AE4B}" dt="2026-03-15T00:52:28.182" v="66"/>
             <ac:spMkLst>
@@ -402,6 +474,33 @@
               <pc:sldMasterMk cId="4082366308" sldId="2147483648"/>
               <pc:sldLayoutMk cId="444478242" sldId="2147483653"/>
               <ac:spMk id="7" creationId="{21A5ED06-FE54-4B86-A8D4-07D0EB08C3AB}"/>
+            </ac:spMkLst>
+          </pc:spChg>
+          <pc:spChg chg="mod">
+            <ac:chgData name="Stefannia Tasayco" userId="072a22e4-2104-4c8c-b416-a8e6a0e1c0b9" providerId="ADAL" clId="{4D11E0C6-27F8-4F56-86FF-F439AAE3AE4B}" dt="2026-03-16T04:11:06.027" v="528" actId="1035"/>
+            <ac:spMkLst>
+              <pc:docMk/>
+              <pc:sldMasterMk cId="4082366308" sldId="2147483648"/>
+              <pc:sldLayoutMk cId="444478242" sldId="2147483653"/>
+              <ac:spMk id="10" creationId="{2D453288-3D76-40C1-BE00-223AB28F13DF}"/>
+            </ac:spMkLst>
+          </pc:spChg>
+          <pc:spChg chg="add mod">
+            <ac:chgData name="Stefannia Tasayco" userId="072a22e4-2104-4c8c-b416-a8e6a0e1c0b9" providerId="ADAL" clId="{4D11E0C6-27F8-4F56-86FF-F439AAE3AE4B}" dt="2026-03-16T04:09:58.373" v="516" actId="14100"/>
+            <ac:spMkLst>
+              <pc:docMk/>
+              <pc:sldMasterMk cId="4082366308" sldId="2147483648"/>
+              <pc:sldLayoutMk cId="444478242" sldId="2147483653"/>
+              <ac:spMk id="11" creationId="{B81BD188-68A5-7042-E91A-782C277EAB2A}"/>
+            </ac:spMkLst>
+          </pc:spChg>
+          <pc:spChg chg="add mod">
+            <ac:chgData name="Stefannia Tasayco" userId="072a22e4-2104-4c8c-b416-a8e6a0e1c0b9" providerId="ADAL" clId="{4D11E0C6-27F8-4F56-86FF-F439AAE3AE4B}" dt="2026-03-16T04:10:02.962" v="517" actId="14100"/>
+            <ac:spMkLst>
+              <pc:docMk/>
+              <pc:sldMasterMk cId="4082366308" sldId="2147483648"/>
+              <pc:sldLayoutMk cId="444478242" sldId="2147483653"/>
+              <ac:spMk id="12" creationId="{19591E8D-121D-C1E5-9EE6-ADB1385B37B2}"/>
             </ac:spMkLst>
           </pc:spChg>
         </pc:sldLayoutChg>
@@ -439,15 +538,15 @@
             </ac:spMkLst>
           </pc:spChg>
         </pc:sldLayoutChg>
-        <pc:sldLayoutChg chg="modSp mod">
-          <pc:chgData name="Stefannia Tasayco" userId="072a22e4-2104-4c8c-b416-a8e6a0e1c0b9" providerId="ADAL" clId="{4D11E0C6-27F8-4F56-86FF-F439AAE3AE4B}" dt="2026-03-15T00:57:18.964" v="253" actId="14100"/>
+        <pc:sldLayoutChg chg="addSp delSp modSp mod">
+          <pc:chgData name="Stefannia Tasayco" userId="072a22e4-2104-4c8c-b416-a8e6a0e1c0b9" providerId="ADAL" clId="{4D11E0C6-27F8-4F56-86FF-F439AAE3AE4B}" dt="2026-03-15T05:16:39.130" v="378" actId="1076"/>
           <pc:sldLayoutMkLst>
             <pc:docMk/>
             <pc:sldMasterMk cId="4082366308" sldId="2147483648"/>
             <pc:sldLayoutMk cId="2543851996" sldId="2147483656"/>
           </pc:sldLayoutMkLst>
           <pc:spChg chg="mod">
-            <ac:chgData name="Stefannia Tasayco" userId="072a22e4-2104-4c8c-b416-a8e6a0e1c0b9" providerId="ADAL" clId="{4D11E0C6-27F8-4F56-86FF-F439AAE3AE4B}" dt="2026-03-15T00:57:18.964" v="253" actId="14100"/>
+            <ac:chgData name="Stefannia Tasayco" userId="072a22e4-2104-4c8c-b416-a8e6a0e1c0b9" providerId="ADAL" clId="{4D11E0C6-27F8-4F56-86FF-F439AAE3AE4B}" dt="2026-03-15T05:16:39.130" v="378" actId="1076"/>
             <ac:spMkLst>
               <pc:docMk/>
               <pc:sldMasterMk cId="4082366308" sldId="2147483648"/>
@@ -464,8 +563,8 @@
               <ac:spMk id="3" creationId="{3D717D3C-533B-4EA9-886B-FAE59956C74C}"/>
             </ac:spMkLst>
           </pc:spChg>
-          <pc:spChg chg="mod">
-            <ac:chgData name="Stefannia Tasayco" userId="072a22e4-2104-4c8c-b416-a8e6a0e1c0b9" providerId="ADAL" clId="{4D11E0C6-27F8-4F56-86FF-F439AAE3AE4B}" dt="2026-03-15T00:57:13.392" v="251" actId="14100"/>
+          <pc:spChg chg="del mod">
+            <ac:chgData name="Stefannia Tasayco" userId="072a22e4-2104-4c8c-b416-a8e6a0e1c0b9" providerId="ADAL" clId="{4D11E0C6-27F8-4F56-86FF-F439AAE3AE4B}" dt="2026-03-15T05:14:19.496" v="335" actId="478"/>
             <ac:spMkLst>
               <pc:docMk/>
               <pc:sldMasterMk cId="4082366308" sldId="2147483648"/>
@@ -480,6 +579,24 @@
               <pc:sldMasterMk cId="4082366308" sldId="2147483648"/>
               <pc:sldLayoutMk cId="2543851996" sldId="2147483656"/>
               <ac:spMk id="5" creationId="{B75A3535-184C-438C-AE91-9C42B7C5AFB6}"/>
+            </ac:spMkLst>
+          </pc:spChg>
+          <pc:spChg chg="add del">
+            <ac:chgData name="Stefannia Tasayco" userId="072a22e4-2104-4c8c-b416-a8e6a0e1c0b9" providerId="ADAL" clId="{4D11E0C6-27F8-4F56-86FF-F439AAE3AE4B}" dt="2026-03-15T05:14:12.521" v="333" actId="11529"/>
+            <ac:spMkLst>
+              <pc:docMk/>
+              <pc:sldMasterMk cId="4082366308" sldId="2147483648"/>
+              <pc:sldLayoutMk cId="2543851996" sldId="2147483656"/>
+              <ac:spMk id="8" creationId="{D622735B-A9C5-F24D-81C3-6A4F7EA387A7}"/>
+            </ac:spMkLst>
+          </pc:spChg>
+          <pc:spChg chg="add mod">
+            <ac:chgData name="Stefannia Tasayco" userId="072a22e4-2104-4c8c-b416-a8e6a0e1c0b9" providerId="ADAL" clId="{4D11E0C6-27F8-4F56-86FF-F439AAE3AE4B}" dt="2026-03-15T05:15:48.724" v="377" actId="255"/>
+            <ac:spMkLst>
+              <pc:docMk/>
+              <pc:sldMasterMk cId="4082366308" sldId="2147483648"/>
+              <pc:sldLayoutMk cId="2543851996" sldId="2147483656"/>
+              <ac:spMk id="9" creationId="{4402DBDA-2555-3941-3E25-E035E1937610}"/>
             </ac:spMkLst>
           </pc:spChg>
         </pc:sldLayoutChg>
@@ -717,7 +834,7 @@
           <a:p>
             <a:fld id="{CEC7C475-2EE1-45DB-87A1-AC32DFA55E52}" type="datetimeFigureOut">
               <a:rPr lang="en-US" smtClean="0"/>
-              <a:t>3/14/2026</a:t>
+              <a:t>3/15/2026</a:t>
             </a:fld>
             <a:endParaRPr lang="en-US"/>
           </a:p>
@@ -1142,7 +1259,7 @@
           <a:p>
             <a:fld id="{F4237474-823B-48E8-A178-386E6D02D7F9}" type="datetime2">
               <a:rPr lang="en-US" smtClean="0"/>
-              <a:t>Saturday, March 14, 2026</a:t>
+              <a:t>Sunday, March 15, 2026</a:t>
             </a:fld>
             <a:endParaRPr lang="en-US"/>
           </a:p>
@@ -1340,7 +1457,7 @@
           <a:p>
             <a:fld id="{BC34246E-588A-4761-B86F-31A92ABCD4D5}" type="datetime2">
               <a:rPr lang="en-US" smtClean="0"/>
-              <a:t>Saturday, March 14, 2026</a:t>
+              <a:t>Sunday, March 15, 2026</a:t>
             </a:fld>
             <a:endParaRPr lang="en-US"/>
           </a:p>
@@ -1550,7 +1667,7 @@
           <a:p>
             <a:fld id="{4C3E9734-38C9-4A1D-A001-D47FFEDBBFBF}" type="datetime2">
               <a:rPr lang="en-US" smtClean="0"/>
-              <a:t>Saturday, March 14, 2026</a:t>
+              <a:t>Sunday, March 15, 2026</a:t>
             </a:fld>
             <a:endParaRPr lang="en-US"/>
           </a:p>
@@ -1762,7 +1879,7 @@
           <a:p>
             <a:fld id="{A6D14B8F-CE2D-424D-AF0A-C48024A68703}" type="datetime2">
               <a:rPr lang="en-US" smtClean="0"/>
-              <a:t>Saturday, March 14, 2026</a:t>
+              <a:t>Sunday, March 15, 2026</a:t>
             </a:fld>
             <a:endParaRPr lang="en-US" cap="all" dirty="0"/>
           </a:p>
@@ -2045,7 +2162,7 @@
           <a:p>
             <a:fld id="{03A95F7C-483B-45C6-BFC8-E460EFA96477}" type="datetime2">
               <a:rPr lang="en-US" smtClean="0"/>
-              <a:t>Saturday, March 14, 2026</a:t>
+              <a:t>Sunday, March 15, 2026</a:t>
             </a:fld>
             <a:endParaRPr lang="en-US"/>
           </a:p>
@@ -2151,7 +2268,12 @@
             <p:ph type="title"/>
           </p:nvPr>
         </p:nvSpPr>
-        <p:spPr/>
+        <p:spPr>
+          <a:xfrm>
+            <a:off x="1371600" y="46380"/>
+            <a:ext cx="10241280" cy="1234440"/>
+          </a:xfrm>
+        </p:spPr>
         <p:txBody>
           <a:bodyPr/>
           <a:lstStyle/>
@@ -2182,8 +2304,8 @@
         </p:nvSpPr>
         <p:spPr>
           <a:xfrm>
-            <a:off x="1371600" y="2112264"/>
-            <a:ext cx="4846320" cy="3959352"/>
+            <a:off x="826265" y="1388125"/>
+            <a:ext cx="5739788" cy="4683491"/>
           </a:xfrm>
         </p:spPr>
         <p:txBody>
@@ -2192,38 +2314,37 @@
           <a:p>
             <a:pPr lvl="0"/>
             <a:r>
-              <a:rPr lang="en-US"/>
+              <a:rPr lang="en-US" dirty="0"/>
               <a:t>Click to edit Master text styles</a:t>
             </a:r>
           </a:p>
           <a:p>
             <a:pPr lvl="1"/>
             <a:r>
-              <a:rPr lang="en-US"/>
+              <a:rPr lang="en-US" dirty="0"/>
               <a:t>Second level</a:t>
             </a:r>
           </a:p>
           <a:p>
             <a:pPr lvl="2"/>
             <a:r>
-              <a:rPr lang="en-US"/>
+              <a:rPr lang="en-US" dirty="0"/>
               <a:t>Third level</a:t>
             </a:r>
           </a:p>
           <a:p>
             <a:pPr lvl="3"/>
             <a:r>
-              <a:rPr lang="en-US"/>
+              <a:rPr lang="en-US" dirty="0"/>
               <a:t>Fourth level</a:t>
             </a:r>
           </a:p>
           <a:p>
             <a:pPr lvl="4"/>
             <a:r>
-              <a:rPr lang="en-US"/>
+              <a:rPr lang="en-US" dirty="0"/>
               <a:t>Fifth level</a:t>
             </a:r>
-            <a:endParaRPr lang="en-US" dirty="0"/>
           </a:p>
         </p:txBody>
       </p:sp>
@@ -2245,8 +2366,8 @@
         </p:nvSpPr>
         <p:spPr>
           <a:xfrm>
-            <a:off x="6766560" y="2112265"/>
-            <a:ext cx="4846320" cy="3959351"/>
+            <a:off x="6766560" y="1388125"/>
+            <a:ext cx="5175724" cy="4913523"/>
           </a:xfrm>
         </p:spPr>
         <p:txBody>
@@ -2255,38 +2376,37 @@
           <a:p>
             <a:pPr lvl="0"/>
             <a:r>
-              <a:rPr lang="en-US"/>
+              <a:rPr lang="en-US" dirty="0"/>
               <a:t>Click to edit Master text styles</a:t>
             </a:r>
           </a:p>
           <a:p>
             <a:pPr lvl="1"/>
             <a:r>
-              <a:rPr lang="en-US"/>
+              <a:rPr lang="en-US" dirty="0"/>
               <a:t>Second level</a:t>
             </a:r>
           </a:p>
           <a:p>
             <a:pPr lvl="2"/>
             <a:r>
-              <a:rPr lang="en-US"/>
+              <a:rPr lang="en-US" dirty="0"/>
               <a:t>Third level</a:t>
             </a:r>
           </a:p>
           <a:p>
             <a:pPr lvl="3"/>
             <a:r>
-              <a:rPr lang="en-US"/>
+              <a:rPr lang="en-US" dirty="0"/>
               <a:t>Fourth level</a:t>
             </a:r>
           </a:p>
           <a:p>
             <a:pPr lvl="4"/>
             <a:r>
-              <a:rPr lang="en-US"/>
+              <a:rPr lang="en-US" dirty="0"/>
               <a:t>Fifth level</a:t>
             </a:r>
-            <a:endParaRPr lang="en-US" dirty="0"/>
           </a:p>
         </p:txBody>
       </p:sp>
@@ -2313,7 +2433,7 @@
           <a:p>
             <a:fld id="{97AFCF0B-5C8B-4F90-8DBC-1FCCD310983A}" type="datetime2">
               <a:rPr lang="en-US" smtClean="0"/>
-              <a:t>Saturday, March 14, 2026</a:t>
+              <a:t>Sunday, March 15, 2026</a:t>
             </a:fld>
             <a:endParaRPr lang="en-US"/>
           </a:p>
@@ -2387,7 +2507,7 @@
 </file>
 
 <file path=ppt/slideLayouts/slideLayout5.xml><?xml version="1.0" encoding="utf-8"?>
-<p:sldLayout xmlns:a="http://schemas.openxmlformats.org/drawingml/2006/main" xmlns:r="http://schemas.openxmlformats.org/officeDocument/2006/relationships" xmlns:p="http://schemas.openxmlformats.org/presentationml/2006/main" preserve="1">
+<p:sldLayout xmlns:a="http://schemas.openxmlformats.org/drawingml/2006/main" xmlns:r="http://schemas.openxmlformats.org/officeDocument/2006/relationships" xmlns:p="http://schemas.openxmlformats.org/presentationml/2006/main" preserve="1" userDrawn="1">
   <p:cSld name="Comparison">
     <p:spTree>
       <p:nvGrpSpPr>
@@ -2405,95 +2525,55 @@
       </p:grpSpPr>
       <p:sp>
         <p:nvSpPr>
-          <p:cNvPr id="3" name="Text Placeholder 2">
-            <a:extLst>
-              <a:ext uri="{FF2B5EF4-FFF2-40B4-BE49-F238E27FC236}">
-                <a16:creationId xmlns:a16="http://schemas.microsoft.com/office/drawing/2014/main" id="{82036E0D-26A5-455A-A8BD-70DA8BC03EB2}"/>
-              </a:ext>
-            </a:extLst>
-          </p:cNvPr>
-          <p:cNvSpPr>
-            <a:spLocks noGrp="1"/>
-          </p:cNvSpPr>
-          <p:nvPr>
-            <p:ph type="body" idx="1"/>
+          <p:cNvPr id="4" name="Content Placeholder 3">
+            <a:extLst>
+              <a:ext uri="{FF2B5EF4-FFF2-40B4-BE49-F238E27FC236}">
+                <a16:creationId xmlns:a16="http://schemas.microsoft.com/office/drawing/2014/main" id="{E7FD4EA0-094D-4056-9032-BFB44B40896B}"/>
+              </a:ext>
+            </a:extLst>
+          </p:cNvPr>
+          <p:cNvSpPr>
+            <a:spLocks noGrp="1"/>
+          </p:cNvSpPr>
+          <p:nvPr>
+            <p:ph sz="half" idx="2"/>
           </p:nvPr>
         </p:nvSpPr>
         <p:spPr>
           <a:xfrm>
-            <a:off x="1371600" y="2112264"/>
-            <a:ext cx="4841076" cy="823912"/>
+            <a:off x="711005" y="3757200"/>
+            <a:ext cx="4841076" cy="2539382"/>
           </a:xfrm>
         </p:spPr>
         <p:txBody>
-          <a:bodyPr anchor="b"/>
-          <a:lstStyle>
-            <a:lvl1pPr marL="0" indent="0">
-              <a:buNone/>
-              <a:defRPr sz="2400" b="1"/>
-            </a:lvl1pPr>
-            <a:lvl2pPr marL="457200" indent="0">
-              <a:buNone/>
-              <a:defRPr sz="2000" b="1"/>
-            </a:lvl2pPr>
-            <a:lvl3pPr marL="914400" indent="0">
-              <a:buNone/>
-              <a:defRPr sz="1800" b="1"/>
-            </a:lvl3pPr>
-            <a:lvl4pPr marL="1371600" indent="0">
-              <a:buNone/>
-              <a:defRPr sz="1600" b="1"/>
-            </a:lvl4pPr>
-            <a:lvl5pPr marL="1828800" indent="0">
-              <a:buNone/>
-              <a:defRPr sz="1600" b="1"/>
-            </a:lvl5pPr>
-            <a:lvl6pPr marL="2286000" indent="0">
-              <a:buNone/>
-              <a:defRPr sz="1600" b="1"/>
-            </a:lvl6pPr>
-            <a:lvl7pPr marL="2743200" indent="0">
-              <a:buNone/>
-              <a:defRPr sz="1600" b="1"/>
-            </a:lvl7pPr>
-            <a:lvl8pPr marL="3200400" indent="0">
-              <a:buNone/>
-              <a:defRPr sz="1600" b="1"/>
-            </a:lvl8pPr>
-            <a:lvl9pPr marL="3657600" indent="0">
-              <a:buNone/>
-              <a:defRPr sz="1600" b="1"/>
-            </a:lvl9pPr>
-          </a:lstStyle>
+          <a:bodyPr/>
+          <a:lstStyle/>
           <a:p>
             <a:pPr lvl="0"/>
-            <a:r>
-              <a:rPr lang="en-US"/>
-              <a:t>Click to edit Master text styles</a:t>
-            </a:r>
-          </a:p>
-        </p:txBody>
-      </p:sp>
-      <p:sp>
-        <p:nvSpPr>
-          <p:cNvPr id="4" name="Content Placeholder 3">
-            <a:extLst>
-              <a:ext uri="{FF2B5EF4-FFF2-40B4-BE49-F238E27FC236}">
-                <a16:creationId xmlns:a16="http://schemas.microsoft.com/office/drawing/2014/main" id="{E7FD4EA0-094D-4056-9032-BFB44B40896B}"/>
-              </a:ext>
-            </a:extLst>
-          </p:cNvPr>
-          <p:cNvSpPr>
-            <a:spLocks noGrp="1"/>
-          </p:cNvSpPr>
-          <p:nvPr>
-            <p:ph sz="half" idx="2"/>
+            <a:endParaRPr lang="en-US" dirty="0"/>
+          </a:p>
+        </p:txBody>
+      </p:sp>
+      <p:sp>
+        <p:nvSpPr>
+          <p:cNvPr id="6" name="Content Placeholder 5">
+            <a:extLst>
+              <a:ext uri="{FF2B5EF4-FFF2-40B4-BE49-F238E27FC236}">
+                <a16:creationId xmlns:a16="http://schemas.microsoft.com/office/drawing/2014/main" id="{56CE86DF-0069-4D31-BDD3-A9A2F9B7B468}"/>
+              </a:ext>
+            </a:extLst>
+          </p:cNvPr>
+          <p:cNvSpPr>
+            <a:spLocks noGrp="1"/>
+          </p:cNvSpPr>
+          <p:nvPr>
+            <p:ph sz="quarter" idx="4"/>
           </p:nvPr>
         </p:nvSpPr>
         <p:spPr>
           <a:xfrm>
-            <a:off x="1371600" y="3018472"/>
-            <a:ext cx="4841076" cy="3104856"/>
+            <a:off x="6818024" y="3757199"/>
+            <a:ext cx="4841076" cy="2539383"/>
           </a:xfrm>
         </p:spPr>
         <p:txBody>
@@ -2501,172 +2581,6 @@
           <a:lstStyle/>
           <a:p>
             <a:pPr lvl="0"/>
-            <a:r>
-              <a:rPr lang="en-US"/>
-              <a:t>Click to edit Master text styles</a:t>
-            </a:r>
-          </a:p>
-          <a:p>
-            <a:pPr lvl="1"/>
-            <a:r>
-              <a:rPr lang="en-US"/>
-              <a:t>Second level</a:t>
-            </a:r>
-          </a:p>
-          <a:p>
-            <a:pPr lvl="2"/>
-            <a:r>
-              <a:rPr lang="en-US"/>
-              <a:t>Third level</a:t>
-            </a:r>
-          </a:p>
-          <a:p>
-            <a:pPr lvl="3"/>
-            <a:r>
-              <a:rPr lang="en-US"/>
-              <a:t>Fourth level</a:t>
-            </a:r>
-          </a:p>
-          <a:p>
-            <a:pPr lvl="4"/>
-            <a:r>
-              <a:rPr lang="en-US"/>
-              <a:t>Fifth level</a:t>
-            </a:r>
-            <a:endParaRPr lang="en-US" dirty="0"/>
-          </a:p>
-        </p:txBody>
-      </p:sp>
-      <p:sp>
-        <p:nvSpPr>
-          <p:cNvPr id="5" name="Text Placeholder 4">
-            <a:extLst>
-              <a:ext uri="{FF2B5EF4-FFF2-40B4-BE49-F238E27FC236}">
-                <a16:creationId xmlns:a16="http://schemas.microsoft.com/office/drawing/2014/main" id="{5FC0CCE8-718F-4620-8B4A-C60EEA7B884D}"/>
-              </a:ext>
-            </a:extLst>
-          </p:cNvPr>
-          <p:cNvSpPr>
-            <a:spLocks noGrp="1"/>
-          </p:cNvSpPr>
-          <p:nvPr>
-            <p:ph type="body" sz="quarter" idx="3"/>
-          </p:nvPr>
-        </p:nvSpPr>
-        <p:spPr>
-          <a:xfrm>
-            <a:off x="6766560" y="2112264"/>
-            <a:ext cx="4846320" cy="823912"/>
-          </a:xfrm>
-        </p:spPr>
-        <p:txBody>
-          <a:bodyPr anchor="b"/>
-          <a:lstStyle>
-            <a:lvl1pPr marL="0" indent="0">
-              <a:buNone/>
-              <a:defRPr sz="2400" b="1"/>
-            </a:lvl1pPr>
-            <a:lvl2pPr marL="457200" indent="0">
-              <a:buNone/>
-              <a:defRPr sz="2000" b="1"/>
-            </a:lvl2pPr>
-            <a:lvl3pPr marL="914400" indent="0">
-              <a:buNone/>
-              <a:defRPr sz="1800" b="1"/>
-            </a:lvl3pPr>
-            <a:lvl4pPr marL="1371600" indent="0">
-              <a:buNone/>
-              <a:defRPr sz="1600" b="1"/>
-            </a:lvl4pPr>
-            <a:lvl5pPr marL="1828800" indent="0">
-              <a:buNone/>
-              <a:defRPr sz="1600" b="1"/>
-            </a:lvl5pPr>
-            <a:lvl6pPr marL="2286000" indent="0">
-              <a:buNone/>
-              <a:defRPr sz="1600" b="1"/>
-            </a:lvl6pPr>
-            <a:lvl7pPr marL="2743200" indent="0">
-              <a:buNone/>
-              <a:defRPr sz="1600" b="1"/>
-            </a:lvl7pPr>
-            <a:lvl8pPr marL="3200400" indent="0">
-              <a:buNone/>
-              <a:defRPr sz="1600" b="1"/>
-            </a:lvl8pPr>
-            <a:lvl9pPr marL="3657600" indent="0">
-              <a:buNone/>
-              <a:defRPr sz="1600" b="1"/>
-            </a:lvl9pPr>
-          </a:lstStyle>
-          <a:p>
-            <a:pPr lvl="0"/>
-            <a:r>
-              <a:rPr lang="en-US"/>
-              <a:t>Click to edit Master text styles</a:t>
-            </a:r>
-          </a:p>
-        </p:txBody>
-      </p:sp>
-      <p:sp>
-        <p:nvSpPr>
-          <p:cNvPr id="6" name="Content Placeholder 5">
-            <a:extLst>
-              <a:ext uri="{FF2B5EF4-FFF2-40B4-BE49-F238E27FC236}">
-                <a16:creationId xmlns:a16="http://schemas.microsoft.com/office/drawing/2014/main" id="{56CE86DF-0069-4D31-BDD3-A9A2F9B7B468}"/>
-              </a:ext>
-            </a:extLst>
-          </p:cNvPr>
-          <p:cNvSpPr>
-            <a:spLocks noGrp="1"/>
-          </p:cNvSpPr>
-          <p:nvPr>
-            <p:ph sz="quarter" idx="4"/>
-          </p:nvPr>
-        </p:nvSpPr>
-        <p:spPr>
-          <a:xfrm>
-            <a:off x="6766560" y="3018471"/>
-            <a:ext cx="4841076" cy="3104857"/>
-          </a:xfrm>
-        </p:spPr>
-        <p:txBody>
-          <a:bodyPr/>
-          <a:lstStyle/>
-          <a:p>
-            <a:pPr lvl="0"/>
-            <a:r>
-              <a:rPr lang="en-US"/>
-              <a:t>Click to edit Master text styles</a:t>
-            </a:r>
-          </a:p>
-          <a:p>
-            <a:pPr lvl="1"/>
-            <a:r>
-              <a:rPr lang="en-US"/>
-              <a:t>Second level</a:t>
-            </a:r>
-          </a:p>
-          <a:p>
-            <a:pPr lvl="2"/>
-            <a:r>
-              <a:rPr lang="en-US"/>
-              <a:t>Third level</a:t>
-            </a:r>
-          </a:p>
-          <a:p>
-            <a:pPr lvl="3"/>
-            <a:r>
-              <a:rPr lang="en-US"/>
-              <a:t>Fourth level</a:t>
-            </a:r>
-          </a:p>
-          <a:p>
-            <a:pPr lvl="4"/>
-            <a:r>
-              <a:rPr lang="en-US"/>
-              <a:t>Fifth level</a:t>
-            </a:r>
             <a:endParaRPr lang="en-US" dirty="0"/>
           </a:p>
         </p:txBody>
@@ -2694,7 +2608,7 @@
           <a:p>
             <a:fld id="{35CB7738-C0D5-4388-9F52-0B359ED750B3}" type="datetime2">
               <a:rPr lang="en-US" smtClean="0"/>
-              <a:t>Saturday, March 14, 2026</a:t>
+              <a:t>Sunday, March 15, 2026</a:t>
             </a:fld>
             <a:endParaRPr lang="en-US"/>
           </a:p>
@@ -2770,16 +2684,180 @@
             <p:ph type="title"/>
           </p:nvPr>
         </p:nvSpPr>
-        <p:spPr/>
+        <p:spPr>
+          <a:xfrm>
+            <a:off x="1371600" y="7377"/>
+            <a:ext cx="10241280" cy="1234440"/>
+          </a:xfrm>
+        </p:spPr>
         <p:txBody>
           <a:bodyPr/>
-          <a:lstStyle/>
-          <a:p>
-            <a:r>
-              <a:rPr lang="en-US"/>
+          <a:lstStyle>
+            <a:lvl1pPr algn="ctr">
+              <a:defRPr/>
+            </a:lvl1pPr>
+          </a:lstStyle>
+          <a:p>
+            <a:r>
+              <a:rPr lang="en-US" dirty="0"/>
               <a:t>Click to edit Master title style</a:t>
             </a:r>
-            <a:endParaRPr lang="en-US" dirty="0"/>
+          </a:p>
+        </p:txBody>
+      </p:sp>
+      <p:sp>
+        <p:nvSpPr>
+          <p:cNvPr id="11" name="Text Placeholder 10">
+            <a:extLst>
+              <a:ext uri="{FF2B5EF4-FFF2-40B4-BE49-F238E27FC236}">
+                <a16:creationId xmlns:a16="http://schemas.microsoft.com/office/drawing/2014/main" id="{B81BD188-68A5-7042-E91A-782C277EAB2A}"/>
+              </a:ext>
+            </a:extLst>
+          </p:cNvPr>
+          <p:cNvSpPr>
+            <a:spLocks noGrp="1"/>
+          </p:cNvSpPr>
+          <p:nvPr>
+            <p:ph type="body" sz="quarter" idx="13"/>
+          </p:nvPr>
+        </p:nvSpPr>
+        <p:spPr>
+          <a:xfrm>
+            <a:off x="203811" y="1536210"/>
+            <a:ext cx="5892189" cy="2036767"/>
+          </a:xfrm>
+        </p:spPr>
+        <p:txBody>
+          <a:bodyPr/>
+          <a:lstStyle>
+            <a:lvl1pPr>
+              <a:defRPr sz="1400"/>
+            </a:lvl1pPr>
+            <a:lvl2pPr>
+              <a:defRPr sz="1400"/>
+            </a:lvl2pPr>
+            <a:lvl3pPr>
+              <a:defRPr sz="1400"/>
+            </a:lvl3pPr>
+            <a:lvl4pPr>
+              <a:defRPr sz="1400"/>
+            </a:lvl4pPr>
+            <a:lvl5pPr>
+              <a:defRPr sz="1400"/>
+            </a:lvl5pPr>
+          </a:lstStyle>
+          <a:p>
+            <a:pPr lvl="0"/>
+            <a:r>
+              <a:rPr lang="en-US" dirty="0"/>
+              <a:t>Click to edit Master text styles</a:t>
+            </a:r>
+          </a:p>
+          <a:p>
+            <a:pPr lvl="1"/>
+            <a:r>
+              <a:rPr lang="en-US" dirty="0"/>
+              <a:t>Second level</a:t>
+            </a:r>
+          </a:p>
+          <a:p>
+            <a:pPr lvl="2"/>
+            <a:r>
+              <a:rPr lang="en-US" dirty="0"/>
+              <a:t>Third level</a:t>
+            </a:r>
+          </a:p>
+          <a:p>
+            <a:pPr lvl="3"/>
+            <a:r>
+              <a:rPr lang="en-US" dirty="0"/>
+              <a:t>Fourth level</a:t>
+            </a:r>
+          </a:p>
+          <a:p>
+            <a:pPr lvl="4"/>
+            <a:r>
+              <a:rPr lang="en-US" dirty="0"/>
+              <a:t>Fifth level</a:t>
+            </a:r>
+          </a:p>
+        </p:txBody>
+      </p:sp>
+      <p:sp>
+        <p:nvSpPr>
+          <p:cNvPr id="12" name="Text Placeholder 10">
+            <a:extLst>
+              <a:ext uri="{FF2B5EF4-FFF2-40B4-BE49-F238E27FC236}">
+                <a16:creationId xmlns:a16="http://schemas.microsoft.com/office/drawing/2014/main" id="{19591E8D-121D-C1E5-9EE6-ADB1385B37B2}"/>
+              </a:ext>
+            </a:extLst>
+          </p:cNvPr>
+          <p:cNvSpPr>
+            <a:spLocks noGrp="1"/>
+          </p:cNvSpPr>
+          <p:nvPr>
+            <p:ph type="body" sz="quarter" idx="14"/>
+          </p:nvPr>
+        </p:nvSpPr>
+        <p:spPr>
+          <a:xfrm>
+            <a:off x="6299811" y="1536210"/>
+            <a:ext cx="5688378" cy="2036767"/>
+          </a:xfrm>
+        </p:spPr>
+        <p:txBody>
+          <a:bodyPr/>
+          <a:lstStyle>
+            <a:lvl1pPr>
+              <a:defRPr sz="1400"/>
+            </a:lvl1pPr>
+            <a:lvl2pPr>
+              <a:defRPr sz="1400"/>
+            </a:lvl2pPr>
+            <a:lvl3pPr>
+              <a:defRPr sz="1400"/>
+            </a:lvl3pPr>
+            <a:lvl4pPr>
+              <a:defRPr sz="1400"/>
+            </a:lvl4pPr>
+            <a:lvl5pPr>
+              <a:defRPr sz="1400"/>
+            </a:lvl5pPr>
+          </a:lstStyle>
+          <a:p>
+            <a:pPr lvl="0"/>
+            <a:r>
+              <a:rPr lang="en-US" dirty="0"/>
+              <a:t>Click to edit Master text styles</a:t>
+            </a:r>
+          </a:p>
+          <a:p>
+            <a:pPr lvl="1"/>
+            <a:r>
+              <a:rPr lang="en-US" dirty="0"/>
+              <a:t>Second level</a:t>
+            </a:r>
+          </a:p>
+          <a:p>
+            <a:pPr lvl="2"/>
+            <a:r>
+              <a:rPr lang="en-US" dirty="0"/>
+              <a:t>Third level</a:t>
+            </a:r>
+          </a:p>
+          <a:p>
+            <a:pPr lvl="3"/>
+            <a:r>
+              <a:rPr lang="en-US" dirty="0"/>
+              <a:t>Fourth level</a:t>
+            </a:r>
+          </a:p>
+          <a:p>
+            <a:pPr lvl="4"/>
+            <a:r>
+              <a:rPr lang="en-US" dirty="0"/>
+              <a:t>Fifth level</a:t>
+            </a:r>
           </a:p>
         </p:txBody>
       </p:sp>
@@ -2864,7 +2942,7 @@
           <a:p>
             <a:fld id="{2AE62429-2491-4ED4-A083-0B70E5B2B9FF}" type="datetime2">
               <a:rPr lang="en-US" smtClean="0"/>
-              <a:t>Saturday, March 14, 2026</a:t>
+              <a:t>Sunday, March 15, 2026</a:t>
             </a:fld>
             <a:endParaRPr lang="en-US"/>
           </a:p>
@@ -2977,7 +3055,7 @@
           <a:p>
             <a:fld id="{543B963C-D443-40F4-97CC-8FE4DEBBB582}" type="datetime2">
               <a:rPr lang="en-US" smtClean="0"/>
-              <a:t>Saturday, March 14, 2026</a:t>
+              <a:t>Sunday, March 15, 2026</a:t>
             </a:fld>
             <a:endParaRPr lang="en-US"/>
           </a:p>
@@ -3051,7 +3129,7 @@
 </file>
 
 <file path=ppt/slideLayouts/slideLayout8.xml><?xml version="1.0" encoding="utf-8"?>
-<p:sldLayout xmlns:a="http://schemas.openxmlformats.org/drawingml/2006/main" xmlns:r="http://schemas.openxmlformats.org/officeDocument/2006/relationships" xmlns:p="http://schemas.openxmlformats.org/presentationml/2006/main" type="objTx" preserve="1">
+<p:sldLayout xmlns:a="http://schemas.openxmlformats.org/drawingml/2006/main" xmlns:r="http://schemas.openxmlformats.org/officeDocument/2006/relationships" xmlns:p="http://schemas.openxmlformats.org/presentationml/2006/main" preserve="1" userDrawn="1">
   <p:cSld name="Content with Caption">
     <p:spTree>
       <p:nvGrpSpPr>
@@ -3085,7 +3163,7 @@
         </p:nvSpPr>
         <p:spPr>
           <a:xfrm>
-            <a:off x="568518" y="41221"/>
+            <a:off x="568146" y="-333356"/>
             <a:ext cx="5243885" cy="1894511"/>
           </a:xfrm>
         </p:spPr>
@@ -3201,24 +3279,323 @@
       </p:sp>
       <p:sp>
         <p:nvSpPr>
-          <p:cNvPr id="4" name="Text Placeholder 3">
-            <a:extLst>
-              <a:ext uri="{FF2B5EF4-FFF2-40B4-BE49-F238E27FC236}">
-                <a16:creationId xmlns:a16="http://schemas.microsoft.com/office/drawing/2014/main" id="{2419D2E1-4B17-4608-961E-2C4719855E89}"/>
-              </a:ext>
-            </a:extLst>
-          </p:cNvPr>
-          <p:cNvSpPr>
-            <a:spLocks noGrp="1"/>
-          </p:cNvSpPr>
-          <p:nvPr>
-            <p:ph type="body" sz="half" idx="2"/>
+          <p:cNvPr id="5" name="Date Placeholder 4">
+            <a:extLst>
+              <a:ext uri="{FF2B5EF4-FFF2-40B4-BE49-F238E27FC236}">
+                <a16:creationId xmlns:a16="http://schemas.microsoft.com/office/drawing/2014/main" id="{B75A3535-184C-438C-AE91-9C42B7C5AFB6}"/>
+              </a:ext>
+            </a:extLst>
+          </p:cNvPr>
+          <p:cNvSpPr>
+            <a:spLocks noGrp="1"/>
+          </p:cNvSpPr>
+          <p:nvPr>
+            <p:ph type="dt" sz="half" idx="10"/>
+          </p:nvPr>
+        </p:nvSpPr>
+        <p:spPr/>
+        <p:txBody>
+          <a:bodyPr/>
+          <a:lstStyle/>
+          <a:p>
+            <a:fld id="{C49F85B7-E7DB-4BA4-A3F5-C5FE55B08F95}" type="datetime2">
+              <a:rPr lang="en-US" smtClean="0"/>
+              <a:t>Sunday, March 15, 2026</a:t>
+            </a:fld>
+            <a:endParaRPr lang="en-US"/>
+          </a:p>
+        </p:txBody>
+      </p:sp>
+      <p:sp>
+        <p:nvSpPr>
+          <p:cNvPr id="6" name="Footer Placeholder 5">
+            <a:extLst>
+              <a:ext uri="{FF2B5EF4-FFF2-40B4-BE49-F238E27FC236}">
+                <a16:creationId xmlns:a16="http://schemas.microsoft.com/office/drawing/2014/main" id="{0DF6DBC3-4A58-42BA-9B55-A9A72510374C}"/>
+              </a:ext>
+            </a:extLst>
+          </p:cNvPr>
+          <p:cNvSpPr>
+            <a:spLocks noGrp="1"/>
+          </p:cNvSpPr>
+          <p:nvPr>
+            <p:ph type="ftr" sz="quarter" idx="11"/>
+          </p:nvPr>
+        </p:nvSpPr>
+        <p:spPr/>
+        <p:txBody>
+          <a:bodyPr/>
+          <a:lstStyle/>
+          <a:p>
+            <a:endParaRPr lang="en-US"/>
+          </a:p>
+        </p:txBody>
+      </p:sp>
+      <p:sp>
+        <p:nvSpPr>
+          <p:cNvPr id="7" name="Slide Number Placeholder 6">
+            <a:extLst>
+              <a:ext uri="{FF2B5EF4-FFF2-40B4-BE49-F238E27FC236}">
+                <a16:creationId xmlns:a16="http://schemas.microsoft.com/office/drawing/2014/main" id="{AD4E6563-0AB6-4038-A12B-A259552DB66C}"/>
+              </a:ext>
+            </a:extLst>
+          </p:cNvPr>
+          <p:cNvSpPr>
+            <a:spLocks noGrp="1"/>
+          </p:cNvSpPr>
+          <p:nvPr>
+            <p:ph type="sldNum" sz="quarter" idx="12"/>
+          </p:nvPr>
+        </p:nvSpPr>
+        <p:spPr/>
+        <p:txBody>
+          <a:bodyPr/>
+          <a:lstStyle/>
+          <a:p>
+            <a:fld id="{C01389E6-C847-4AD0-B56D-D205B2EAB1EE}" type="slidenum">
+              <a:rPr lang="en-US" smtClean="0"/>
+              <a:t>‹#›</a:t>
+            </a:fld>
+            <a:endParaRPr lang="en-US"/>
+          </a:p>
+        </p:txBody>
+      </p:sp>
+      <p:sp>
+        <p:nvSpPr>
+          <p:cNvPr id="9" name="Text Placeholder 8">
+            <a:extLst>
+              <a:ext uri="{FF2B5EF4-FFF2-40B4-BE49-F238E27FC236}">
+                <a16:creationId xmlns:a16="http://schemas.microsoft.com/office/drawing/2014/main" id="{4402DBDA-2555-3941-3E25-E035E1937610}"/>
+              </a:ext>
+            </a:extLst>
+          </p:cNvPr>
+          <p:cNvSpPr>
+            <a:spLocks noGrp="1"/>
+          </p:cNvSpPr>
+          <p:nvPr>
+            <p:ph type="body" sz="quarter" idx="13"/>
           </p:nvPr>
         </p:nvSpPr>
         <p:spPr>
           <a:xfrm>
-            <a:off x="568518" y="2115047"/>
-            <a:ext cx="5243885" cy="3746003"/>
+            <a:off x="568518" y="1751682"/>
+            <a:ext cx="5243513" cy="4339953"/>
+          </a:xfrm>
+        </p:spPr>
+        <p:txBody>
+          <a:bodyPr/>
+          <a:lstStyle>
+            <a:lvl1pPr>
+              <a:defRPr sz="1400"/>
+            </a:lvl1pPr>
+            <a:lvl2pPr>
+              <a:defRPr sz="1400"/>
+            </a:lvl2pPr>
+            <a:lvl3pPr>
+              <a:defRPr sz="1400"/>
+            </a:lvl3pPr>
+            <a:lvl4pPr>
+              <a:defRPr sz="1400"/>
+            </a:lvl4pPr>
+            <a:lvl5pPr>
+              <a:defRPr sz="1400"/>
+            </a:lvl5pPr>
+          </a:lstStyle>
+          <a:p>
+            <a:pPr lvl="0"/>
+            <a:r>
+              <a:rPr lang="en-US" dirty="0"/>
+              <a:t>Click to edit Master text styles</a:t>
+            </a:r>
+          </a:p>
+          <a:p>
+            <a:pPr lvl="1"/>
+            <a:r>
+              <a:rPr lang="en-US" dirty="0"/>
+              <a:t>Second level</a:t>
+            </a:r>
+          </a:p>
+          <a:p>
+            <a:pPr lvl="2"/>
+            <a:r>
+              <a:rPr lang="en-US" dirty="0"/>
+              <a:t>Third level</a:t>
+            </a:r>
+          </a:p>
+          <a:p>
+            <a:pPr lvl="3"/>
+            <a:r>
+              <a:rPr lang="en-US" dirty="0"/>
+              <a:t>Fourth level</a:t>
+            </a:r>
+          </a:p>
+          <a:p>
+            <a:pPr lvl="4"/>
+            <a:r>
+              <a:rPr lang="en-US" dirty="0"/>
+              <a:t>Fifth level</a:t>
+            </a:r>
+          </a:p>
+        </p:txBody>
+      </p:sp>
+    </p:spTree>
+    <p:extLst>
+      <p:ext uri="{BB962C8B-B14F-4D97-AF65-F5344CB8AC3E}">
+        <p14:creationId xmlns:p14="http://schemas.microsoft.com/office/powerpoint/2010/main" val="2543851996"/>
+      </p:ext>
+    </p:extLst>
+  </p:cSld>
+  <p:clrMapOvr>
+    <a:masterClrMapping/>
+  </p:clrMapOvr>
+</p:sldLayout>
+</file>
+
+<file path=ppt/slideLayouts/slideLayout9.xml><?xml version="1.0" encoding="utf-8"?>
+<p:sldLayout xmlns:a="http://schemas.openxmlformats.org/drawingml/2006/main" xmlns:r="http://schemas.openxmlformats.org/officeDocument/2006/relationships" xmlns:p="http://schemas.openxmlformats.org/presentationml/2006/main" type="picTx" preserve="1">
+  <p:cSld name="Picture with Caption">
+    <p:spTree>
+      <p:nvGrpSpPr>
+        <p:cNvPr id="1" name=""/>
+        <p:cNvGrpSpPr/>
+        <p:nvPr/>
+      </p:nvGrpSpPr>
+      <p:grpSpPr>
+        <a:xfrm>
+          <a:off x="0" y="0"/>
+          <a:ext cx="0" cy="0"/>
+          <a:chOff x="0" y="0"/>
+          <a:chExt cx="0" cy="0"/>
+        </a:xfrm>
+      </p:grpSpPr>
+      <p:sp>
+        <p:nvSpPr>
+          <p:cNvPr id="2" name="Title 1">
+            <a:extLst>
+              <a:ext uri="{FF2B5EF4-FFF2-40B4-BE49-F238E27FC236}">
+                <a16:creationId xmlns:a16="http://schemas.microsoft.com/office/drawing/2014/main" id="{BE9702C5-1E3B-4C62-A538-59BB572864A0}"/>
+              </a:ext>
+            </a:extLst>
+          </p:cNvPr>
+          <p:cNvSpPr>
+            <a:spLocks noGrp="1"/>
+          </p:cNvSpPr>
+          <p:nvPr>
+            <p:ph type="title"/>
+          </p:nvPr>
+        </p:nvSpPr>
+        <p:spPr>
+          <a:xfrm>
+            <a:off x="1371600" y="987552"/>
+            <a:ext cx="3932237" cy="1892808"/>
+          </a:xfrm>
+        </p:spPr>
+        <p:txBody>
+          <a:bodyPr anchor="b"/>
+          <a:lstStyle>
+            <a:lvl1pPr>
+              <a:defRPr sz="3200" baseline="0"/>
+            </a:lvl1pPr>
+          </a:lstStyle>
+          <a:p>
+            <a:r>
+              <a:rPr lang="en-US"/>
+              <a:t>Click to edit Master title style</a:t>
+            </a:r>
+            <a:endParaRPr lang="en-US" dirty="0"/>
+          </a:p>
+        </p:txBody>
+      </p:sp>
+      <p:sp>
+        <p:nvSpPr>
+          <p:cNvPr id="3" name="Picture Placeholder 2">
+            <a:extLst>
+              <a:ext uri="{FF2B5EF4-FFF2-40B4-BE49-F238E27FC236}">
+                <a16:creationId xmlns:a16="http://schemas.microsoft.com/office/drawing/2014/main" id="{6E2CF574-95CE-4E60-B2CF-3B5B4F33A767}"/>
+              </a:ext>
+            </a:extLst>
+          </p:cNvPr>
+          <p:cNvSpPr>
+            <a:spLocks noGrp="1"/>
+          </p:cNvSpPr>
+          <p:nvPr>
+            <p:ph type="pic" idx="1"/>
+          </p:nvPr>
+        </p:nvSpPr>
+        <p:spPr>
+          <a:xfrm>
+            <a:off x="5505319" y="987425"/>
+            <a:ext cx="5833242" cy="4873625"/>
+          </a:xfrm>
+        </p:spPr>
+        <p:txBody>
+          <a:bodyPr/>
+          <a:lstStyle>
+            <a:lvl1pPr marL="0" indent="0">
+              <a:buNone/>
+              <a:defRPr sz="3200"/>
+            </a:lvl1pPr>
+            <a:lvl2pPr marL="457200" indent="0">
+              <a:buNone/>
+              <a:defRPr sz="2800"/>
+            </a:lvl2pPr>
+            <a:lvl3pPr marL="914400" indent="0">
+              <a:buNone/>
+              <a:defRPr sz="2400"/>
+            </a:lvl3pPr>
+            <a:lvl4pPr marL="1371600" indent="0">
+              <a:buNone/>
+              <a:defRPr sz="2000"/>
+            </a:lvl4pPr>
+            <a:lvl5pPr marL="1828800" indent="0">
+              <a:buNone/>
+              <a:defRPr sz="2000"/>
+            </a:lvl5pPr>
+            <a:lvl6pPr marL="2286000" indent="0">
+              <a:buNone/>
+              <a:defRPr sz="2000"/>
+            </a:lvl6pPr>
+            <a:lvl7pPr marL="2743200" indent="0">
+              <a:buNone/>
+              <a:defRPr sz="2000"/>
+            </a:lvl7pPr>
+            <a:lvl8pPr marL="3200400" indent="0">
+              <a:buNone/>
+              <a:defRPr sz="2000"/>
+            </a:lvl8pPr>
+            <a:lvl9pPr marL="3657600" indent="0">
+              <a:buNone/>
+              <a:defRPr sz="2000"/>
+            </a:lvl9pPr>
+          </a:lstStyle>
+          <a:p>
+            <a:r>
+              <a:rPr lang="en-US"/>
+              <a:t>Click icon to add picture</a:t>
+            </a:r>
+          </a:p>
+        </p:txBody>
+      </p:sp>
+      <p:sp>
+        <p:nvSpPr>
+          <p:cNvPr id="4" name="Text Placeholder 3">
+            <a:extLst>
+              <a:ext uri="{FF2B5EF4-FFF2-40B4-BE49-F238E27FC236}">
+                <a16:creationId xmlns:a16="http://schemas.microsoft.com/office/drawing/2014/main" id="{6D039F7C-C735-4356-8B04-89E19047950C}"/>
+              </a:ext>
+            </a:extLst>
+          </p:cNvPr>
+          <p:cNvSpPr>
+            <a:spLocks noGrp="1"/>
+          </p:cNvSpPr>
+          <p:nvPr>
+            <p:ph type="body" sz="half" idx="2"/>
+          </p:nvPr>
+        </p:nvSpPr>
+        <p:spPr>
+          <a:xfrm>
+            <a:off x="1371600" y="3033286"/>
+            <a:ext cx="3932237" cy="2835702"/>
           </a:xfrm>
         </p:spPr>
         <p:txBody>
@@ -3264,298 +3641,6 @@
           <a:p>
             <a:pPr lvl="0"/>
             <a:r>
-              <a:rPr lang="en-US" dirty="0"/>
-              <a:t>Click to edit Master text styles</a:t>
-            </a:r>
-          </a:p>
-        </p:txBody>
-      </p:sp>
-      <p:sp>
-        <p:nvSpPr>
-          <p:cNvPr id="5" name="Date Placeholder 4">
-            <a:extLst>
-              <a:ext uri="{FF2B5EF4-FFF2-40B4-BE49-F238E27FC236}">
-                <a16:creationId xmlns:a16="http://schemas.microsoft.com/office/drawing/2014/main" id="{B75A3535-184C-438C-AE91-9C42B7C5AFB6}"/>
-              </a:ext>
-            </a:extLst>
-          </p:cNvPr>
-          <p:cNvSpPr>
-            <a:spLocks noGrp="1"/>
-          </p:cNvSpPr>
-          <p:nvPr>
-            <p:ph type="dt" sz="half" idx="10"/>
-          </p:nvPr>
-        </p:nvSpPr>
-        <p:spPr/>
-        <p:txBody>
-          <a:bodyPr/>
-          <a:lstStyle/>
-          <a:p>
-            <a:fld id="{C49F85B7-E7DB-4BA4-A3F5-C5FE55B08F95}" type="datetime2">
-              <a:rPr lang="en-US" smtClean="0"/>
-              <a:t>Saturday, March 14, 2026</a:t>
-            </a:fld>
-            <a:endParaRPr lang="en-US"/>
-          </a:p>
-        </p:txBody>
-      </p:sp>
-      <p:sp>
-        <p:nvSpPr>
-          <p:cNvPr id="6" name="Footer Placeholder 5">
-            <a:extLst>
-              <a:ext uri="{FF2B5EF4-FFF2-40B4-BE49-F238E27FC236}">
-                <a16:creationId xmlns:a16="http://schemas.microsoft.com/office/drawing/2014/main" id="{0DF6DBC3-4A58-42BA-9B55-A9A72510374C}"/>
-              </a:ext>
-            </a:extLst>
-          </p:cNvPr>
-          <p:cNvSpPr>
-            <a:spLocks noGrp="1"/>
-          </p:cNvSpPr>
-          <p:nvPr>
-            <p:ph type="ftr" sz="quarter" idx="11"/>
-          </p:nvPr>
-        </p:nvSpPr>
-        <p:spPr/>
-        <p:txBody>
-          <a:bodyPr/>
-          <a:lstStyle/>
-          <a:p>
-            <a:endParaRPr lang="en-US"/>
-          </a:p>
-        </p:txBody>
-      </p:sp>
-      <p:sp>
-        <p:nvSpPr>
-          <p:cNvPr id="7" name="Slide Number Placeholder 6">
-            <a:extLst>
-              <a:ext uri="{FF2B5EF4-FFF2-40B4-BE49-F238E27FC236}">
-                <a16:creationId xmlns:a16="http://schemas.microsoft.com/office/drawing/2014/main" id="{AD4E6563-0AB6-4038-A12B-A259552DB66C}"/>
-              </a:ext>
-            </a:extLst>
-          </p:cNvPr>
-          <p:cNvSpPr>
-            <a:spLocks noGrp="1"/>
-          </p:cNvSpPr>
-          <p:nvPr>
-            <p:ph type="sldNum" sz="quarter" idx="12"/>
-          </p:nvPr>
-        </p:nvSpPr>
-        <p:spPr/>
-        <p:txBody>
-          <a:bodyPr/>
-          <a:lstStyle/>
-          <a:p>
-            <a:fld id="{C01389E6-C847-4AD0-B56D-D205B2EAB1EE}" type="slidenum">
-              <a:rPr lang="en-US" smtClean="0"/>
-              <a:t>‹#›</a:t>
-            </a:fld>
-            <a:endParaRPr lang="en-US"/>
-          </a:p>
-        </p:txBody>
-      </p:sp>
-    </p:spTree>
-    <p:extLst>
-      <p:ext uri="{BB962C8B-B14F-4D97-AF65-F5344CB8AC3E}">
-        <p14:creationId xmlns:p14="http://schemas.microsoft.com/office/powerpoint/2010/main" val="2543851996"/>
-      </p:ext>
-    </p:extLst>
-  </p:cSld>
-  <p:clrMapOvr>
-    <a:masterClrMapping/>
-  </p:clrMapOvr>
-</p:sldLayout>
-</file>
-
-<file path=ppt/slideLayouts/slideLayout9.xml><?xml version="1.0" encoding="utf-8"?>
-<p:sldLayout xmlns:a="http://schemas.openxmlformats.org/drawingml/2006/main" xmlns:r="http://schemas.openxmlformats.org/officeDocument/2006/relationships" xmlns:p="http://schemas.openxmlformats.org/presentationml/2006/main" type="picTx" preserve="1">
-  <p:cSld name="Picture with Caption">
-    <p:spTree>
-      <p:nvGrpSpPr>
-        <p:cNvPr id="1" name=""/>
-        <p:cNvGrpSpPr/>
-        <p:nvPr/>
-      </p:nvGrpSpPr>
-      <p:grpSpPr>
-        <a:xfrm>
-          <a:off x="0" y="0"/>
-          <a:ext cx="0" cy="0"/>
-          <a:chOff x="0" y="0"/>
-          <a:chExt cx="0" cy="0"/>
-        </a:xfrm>
-      </p:grpSpPr>
-      <p:sp>
-        <p:nvSpPr>
-          <p:cNvPr id="2" name="Title 1">
-            <a:extLst>
-              <a:ext uri="{FF2B5EF4-FFF2-40B4-BE49-F238E27FC236}">
-                <a16:creationId xmlns:a16="http://schemas.microsoft.com/office/drawing/2014/main" id="{BE9702C5-1E3B-4C62-A538-59BB572864A0}"/>
-              </a:ext>
-            </a:extLst>
-          </p:cNvPr>
-          <p:cNvSpPr>
-            <a:spLocks noGrp="1"/>
-          </p:cNvSpPr>
-          <p:nvPr>
-            <p:ph type="title"/>
-          </p:nvPr>
-        </p:nvSpPr>
-        <p:spPr>
-          <a:xfrm>
-            <a:off x="1371600" y="987552"/>
-            <a:ext cx="3932237" cy="1892808"/>
-          </a:xfrm>
-        </p:spPr>
-        <p:txBody>
-          <a:bodyPr anchor="b"/>
-          <a:lstStyle>
-            <a:lvl1pPr>
-              <a:defRPr sz="3200" baseline="0"/>
-            </a:lvl1pPr>
-          </a:lstStyle>
-          <a:p>
-            <a:r>
-              <a:rPr lang="en-US"/>
-              <a:t>Click to edit Master title style</a:t>
-            </a:r>
-            <a:endParaRPr lang="en-US" dirty="0"/>
-          </a:p>
-        </p:txBody>
-      </p:sp>
-      <p:sp>
-        <p:nvSpPr>
-          <p:cNvPr id="3" name="Picture Placeholder 2">
-            <a:extLst>
-              <a:ext uri="{FF2B5EF4-FFF2-40B4-BE49-F238E27FC236}">
-                <a16:creationId xmlns:a16="http://schemas.microsoft.com/office/drawing/2014/main" id="{6E2CF574-95CE-4E60-B2CF-3B5B4F33A767}"/>
-              </a:ext>
-            </a:extLst>
-          </p:cNvPr>
-          <p:cNvSpPr>
-            <a:spLocks noGrp="1"/>
-          </p:cNvSpPr>
-          <p:nvPr>
-            <p:ph type="pic" idx="1"/>
-          </p:nvPr>
-        </p:nvSpPr>
-        <p:spPr>
-          <a:xfrm>
-            <a:off x="5505319" y="987425"/>
-            <a:ext cx="5833242" cy="4873625"/>
-          </a:xfrm>
-        </p:spPr>
-        <p:txBody>
-          <a:bodyPr/>
-          <a:lstStyle>
-            <a:lvl1pPr marL="0" indent="0">
-              <a:buNone/>
-              <a:defRPr sz="3200"/>
-            </a:lvl1pPr>
-            <a:lvl2pPr marL="457200" indent="0">
-              <a:buNone/>
-              <a:defRPr sz="2800"/>
-            </a:lvl2pPr>
-            <a:lvl3pPr marL="914400" indent="0">
-              <a:buNone/>
-              <a:defRPr sz="2400"/>
-            </a:lvl3pPr>
-            <a:lvl4pPr marL="1371600" indent="0">
-              <a:buNone/>
-              <a:defRPr sz="2000"/>
-            </a:lvl4pPr>
-            <a:lvl5pPr marL="1828800" indent="0">
-              <a:buNone/>
-              <a:defRPr sz="2000"/>
-            </a:lvl5pPr>
-            <a:lvl6pPr marL="2286000" indent="0">
-              <a:buNone/>
-              <a:defRPr sz="2000"/>
-            </a:lvl6pPr>
-            <a:lvl7pPr marL="2743200" indent="0">
-              <a:buNone/>
-              <a:defRPr sz="2000"/>
-            </a:lvl7pPr>
-            <a:lvl8pPr marL="3200400" indent="0">
-              <a:buNone/>
-              <a:defRPr sz="2000"/>
-            </a:lvl8pPr>
-            <a:lvl9pPr marL="3657600" indent="0">
-              <a:buNone/>
-              <a:defRPr sz="2000"/>
-            </a:lvl9pPr>
-          </a:lstStyle>
-          <a:p>
-            <a:r>
-              <a:rPr lang="en-US"/>
-              <a:t>Click icon to add picture</a:t>
-            </a:r>
-          </a:p>
-        </p:txBody>
-      </p:sp>
-      <p:sp>
-        <p:nvSpPr>
-          <p:cNvPr id="4" name="Text Placeholder 3">
-            <a:extLst>
-              <a:ext uri="{FF2B5EF4-FFF2-40B4-BE49-F238E27FC236}">
-                <a16:creationId xmlns:a16="http://schemas.microsoft.com/office/drawing/2014/main" id="{6D039F7C-C735-4356-8B04-89E19047950C}"/>
-              </a:ext>
-            </a:extLst>
-          </p:cNvPr>
-          <p:cNvSpPr>
-            <a:spLocks noGrp="1"/>
-          </p:cNvSpPr>
-          <p:nvPr>
-            <p:ph type="body" sz="half" idx="2"/>
-          </p:nvPr>
-        </p:nvSpPr>
-        <p:spPr>
-          <a:xfrm>
-            <a:off x="1371600" y="3033286"/>
-            <a:ext cx="3932237" cy="2835702"/>
-          </a:xfrm>
-        </p:spPr>
-        <p:txBody>
-          <a:bodyPr/>
-          <a:lstStyle>
-            <a:lvl1pPr marL="0" indent="0">
-              <a:buNone/>
-              <a:defRPr sz="1600"/>
-            </a:lvl1pPr>
-            <a:lvl2pPr marL="457200" indent="0">
-              <a:buNone/>
-              <a:defRPr sz="1400"/>
-            </a:lvl2pPr>
-            <a:lvl3pPr marL="914400" indent="0">
-              <a:buNone/>
-              <a:defRPr sz="1200"/>
-            </a:lvl3pPr>
-            <a:lvl4pPr marL="1371600" indent="0">
-              <a:buNone/>
-              <a:defRPr sz="1000"/>
-            </a:lvl4pPr>
-            <a:lvl5pPr marL="1828800" indent="0">
-              <a:buNone/>
-              <a:defRPr sz="1000"/>
-            </a:lvl5pPr>
-            <a:lvl6pPr marL="2286000" indent="0">
-              <a:buNone/>
-              <a:defRPr sz="1000"/>
-            </a:lvl6pPr>
-            <a:lvl7pPr marL="2743200" indent="0">
-              <a:buNone/>
-              <a:defRPr sz="1000"/>
-            </a:lvl7pPr>
-            <a:lvl8pPr marL="3200400" indent="0">
-              <a:buNone/>
-              <a:defRPr sz="1000"/>
-            </a:lvl8pPr>
-            <a:lvl9pPr marL="3657600" indent="0">
-              <a:buNone/>
-              <a:defRPr sz="1000"/>
-            </a:lvl9pPr>
-          </a:lstStyle>
-          <a:p>
-            <a:pPr lvl="0"/>
-            <a:r>
               <a:rPr lang="en-US"/>
               <a:t>Click to edit Master text styles</a:t>
             </a:r>
@@ -3585,7 +3670,7 @@
           <a:p>
             <a:fld id="{38E9A0C2-0448-4687-AEE4-71847FB40C42}" type="datetime2">
               <a:rPr lang="en-US" smtClean="0"/>
-              <a:t>Saturday, March 14, 2026</a:t>
+              <a:t>Sunday, March 15, 2026</a:t>
             </a:fld>
             <a:endParaRPr lang="en-US"/>
           </a:p>
@@ -3954,7 +4039,7 @@
           <a:p>
             <a:fld id="{A6D14B8F-CE2D-424D-AF0A-C48024A68703}" type="datetime2">
               <a:rPr lang="en-US" smtClean="0"/>
-              <a:t>Saturday, March 14, 2026</a:t>
+              <a:t>Sunday, March 15, 2026</a:t>
             </a:fld>
             <a:endParaRPr lang="en-US" cap="all" dirty="0"/>
           </a:p>
